--- a/Martes-16/S02_Martes-16_1_Carrusel_El-sello-INPRE_4x5.pptx
+++ b/Martes-16/S02_Martes-16_1_Carrusel_El-sello-INPRE_4x5.pptx
@@ -3178,7 +3178,7 @@
         <p:spPr>
           <a:xfrm>
             <a:off x="777240" y="777240"/>
-            <a:ext cx="2018538" cy="373380"/>
+            <a:ext cx="2521458" cy="373380"/>
           </a:xfrm>
           <a:prstGeom prst="roundRect">
             <a:avLst>
@@ -3219,7 +3219,7 @@
                 </a:solidFill>
                 <a:latin typeface="Inter"/>
               </a:rPr>
-              <a:t>PISTA DEL DÍA</a:t>
+              <a:t>CONTRATOS VISADOS</a:t>
             </a:r>
           </a:p>
         </p:txBody>
@@ -3367,7 +3367,7 @@
                 </a:solidFill>
                 <a:latin typeface="Inter"/>
               </a:rPr>
-              <a:t>INPRE: el respaldo de un abogado venezolano.</a:t>
+              <a:t>INPRE: el respaldo de un abogado venezolano certificado.</a:t>
             </a:r>
           </a:p>
         </p:txBody>
@@ -3597,7 +3597,7 @@
         </p:nvSpPr>
         <p:spPr>
           <a:xfrm>
-            <a:off x="777240" y="1983486"/>
+            <a:off x="777240" y="1792986"/>
             <a:ext cx="1371600" cy="146304"/>
           </a:xfrm>
           <a:prstGeom prst="rect">
@@ -3641,8 +3641,8 @@
         </p:nvSpPr>
         <p:spPr>
           <a:xfrm>
-            <a:off x="777240" y="2440686"/>
-            <a:ext cx="6675120" cy="4674108"/>
+            <a:off x="777240" y="2250186"/>
+            <a:ext cx="6675120" cy="5055108"/>
           </a:xfrm>
           <a:prstGeom prst="rect">
             <a:avLst/>
@@ -3661,13 +3661,13 @@
               </a:lnSpc>
             </a:pPr>
             <a:r>
-              <a:rPr sz="9200" b="1">
+              <a:rPr sz="6000" b="1">
                 <a:solidFill>
                   <a:srgbClr val="FFFFFF"/>
                 </a:solidFill>
                 <a:latin typeface="Inter"/>
               </a:rPr>
-              <a:t>Digital y físico.</a:t>
+              <a:t>Digital cuando lo necesitas, original a tu domicilio.</a:t>
             </a:r>
           </a:p>
         </p:txBody>
@@ -3680,8 +3680,8 @@
         </p:nvSpPr>
         <p:spPr>
           <a:xfrm>
-            <a:off x="777240" y="7114794"/>
-            <a:ext cx="6675120" cy="1118108"/>
+            <a:off x="777240" y="7305294"/>
+            <a:ext cx="6675120" cy="1530858"/>
           </a:xfrm>
           <a:prstGeom prst="rect">
             <a:avLst/>
@@ -3706,7 +3706,7 @@
                 </a:solidFill>
                 <a:latin typeface="Inter"/>
               </a:rPr>
-              <a:t>Lo verás el 22.</a:t>
+              <a:t>Ya en early access: notaly.com.ve</a:t>
             </a:r>
           </a:p>
         </p:txBody>

--- a/Martes-16/S02_Martes-16_1_Carrusel_El-sello-INPRE_4x5.pptx
+++ b/Martes-16/S02_Martes-16_1_Carrusel_El-sello-INPRE_4x5.pptx
@@ -3597,7 +3597,7 @@
         </p:nvSpPr>
         <p:spPr>
           <a:xfrm>
-            <a:off x="777240" y="1792986"/>
+            <a:off x="777240" y="1280160"/>
             <a:ext cx="1371600" cy="146304"/>
           </a:xfrm>
           <a:prstGeom prst="rect">
@@ -3641,8 +3641,8 @@
         </p:nvSpPr>
         <p:spPr>
           <a:xfrm>
-            <a:off x="777240" y="2250186"/>
-            <a:ext cx="6675120" cy="5055108"/>
+            <a:off x="777240" y="1737360"/>
+            <a:ext cx="6675120" cy="6388608"/>
           </a:xfrm>
           <a:prstGeom prst="rect">
             <a:avLst/>
@@ -3661,7 +3661,7 @@
               </a:lnSpc>
             </a:pPr>
             <a:r>
-              <a:rPr sz="6000" b="1">
+              <a:rPr sz="6400" b="1">
                 <a:solidFill>
                   <a:srgbClr val="FFFFFF"/>
                 </a:solidFill>
@@ -3680,8 +3680,8 @@
         </p:nvSpPr>
         <p:spPr>
           <a:xfrm>
-            <a:off x="777240" y="7305294"/>
-            <a:ext cx="6675120" cy="1530858"/>
+            <a:off x="777240" y="7934452"/>
+            <a:ext cx="6675120" cy="1118108"/>
           </a:xfrm>
           <a:prstGeom prst="rect">
             <a:avLst/>
@@ -3706,7 +3706,7 @@
                 </a:solidFill>
                 <a:latin typeface="Inter"/>
               </a:rPr>
-              <a:t>Ya en early access: notaly.com.ve</a:t>
+              <a:t>Conócenos en notaly.com.ve</a:t>
             </a:r>
           </a:p>
         </p:txBody>
